--- a/ios/SampleMaterials/Week 3 Slides - Environment Diagrams.pptx
+++ b/ios/SampleMaterials/Week 3 Slides - Environment Diagrams.pptx
@@ -1267,7 +1267,28 @@
                 <a:ea typeface="Cambria" pitchFamily="34" charset="-122"/>
                 <a:cs typeface="Cambria" pitchFamily="34" charset="-120"/>
               </a:rPr>
-              <a:t>Environment Diagrams</a:t>
+              <a:t>Environment</a:t>
+            </a:r>
+            <a:br>
+              <a:rPr lang="en-US" sz="4400" b="1" dirty="0">
+                <a:solidFill>
+                  <a:srgbClr val="FFFFFF"/>
+                </a:solidFill>
+                <a:latin typeface="Cambria" pitchFamily="34" charset="0"/>
+                <a:ea typeface="Cambria" pitchFamily="34" charset="-122"/>
+                <a:cs typeface="Cambria" pitchFamily="34" charset="-120"/>
+              </a:rPr>
+            </a:br>
+            <a:r>
+              <a:rPr lang="en-US" sz="4400" b="1" dirty="0">
+                <a:solidFill>
+                  <a:srgbClr val="FFFFFF"/>
+                </a:solidFill>
+                <a:latin typeface="Cambria" pitchFamily="34" charset="0"/>
+                <a:ea typeface="Cambria" pitchFamily="34" charset="-122"/>
+                <a:cs typeface="Cambria" pitchFamily="34" charset="-120"/>
+              </a:rPr>
+              <a:t>Diagrams</a:t>
             </a:r>
             <a:endParaRPr lang="en-US" sz="4400" dirty="0"/>
           </a:p>
@@ -1674,7 +1695,9 @@
         <p:nvSpPr>
           <p:cNvPr id="2" name="Text 0"/>
           <p:cNvSpPr txBox="1"/>
-          <p:nvPr/>
+          <p:nvPr>
+            <p:ph type="title"/>
+          </p:nvPr>
         </p:nvSpPr>
         <p:spPr>
           <a:xfrm>
@@ -1704,6 +1727,22 @@
                 <a:cs typeface="Cambria" pitchFamily="34" charset="-120"/>
               </a:rPr>
               <a:t>What a frame is</a:t>
+            </a:r>
+          </a:p>
+          <a:p>
+            <a:pPr indent="0" marL="0">
+              <a:buNone/>
+            </a:pPr>
+            <a:r>
+              <a:rPr lang="en-US" sz="3600" b="1" dirty="0">
+                <a:solidFill>
+                  <a:srgbClr val="1C2B2F"/>
+                </a:solidFill>
+                <a:latin typeface="Cambria" pitchFamily="34" charset="0"/>
+                <a:ea typeface="Cambria" pitchFamily="34" charset="-122"/>
+                <a:cs typeface="Cambria" pitchFamily="34" charset="-120"/>
+              </a:rPr>
+              <a:t>and why it has a parent</a:t>
             </a:r>
             <a:endParaRPr lang="en-US" sz="3600" dirty="0"/>
           </a:p>
